--- a/media/resources/files/Onduktar_KoboytuuBoluu1234_yXTy25D.pptx
+++ b/media/resources/files/Onduktar_KoboytuuBoluu1234_yXTy25D.pptx
@@ -4822,7 +4822,7 @@
                 <a:ea typeface="+mn-ea"/>
                 <a:cs typeface="+mn-cs"/>
               </a:rPr>
-              <a:t>Турдуу пикирлер учун ыраазычылык билдиребиз.</a:t>
+              <a:t>Түрдүү пикирлер үчүн ыраазычылык билдиребиз.</a:t>
             </a:r>
           </a:p>
           <a:p>

--- a/media/resources/files/Onduktar_KoboytuuBoluu1234_yXTy25D.pptx
+++ b/media/resources/files/Onduktar_KoboytuuBoluu1234_yXTy25D.pptx
@@ -2388,7 +2388,7 @@
             <a:pPr algn="ctr"/>
             <a:r>
               <a:rPr lang="en-GB" sz="2000" dirty="0"/>
-              <a:t>6 × 0.4</a:t>
+              <a:t>6 × 0,4</a:t>
             </a:r>
           </a:p>
         </p:txBody>
@@ -2619,7 +2619,7 @@
             <a:pPr algn="ctr"/>
             <a:r>
               <a:rPr lang="en-GB" sz="2000" dirty="0"/>
-              <a:t>3.1 × 0.3</a:t>
+              <a:t>3,1 × 0,3</a:t>
             </a:r>
           </a:p>
         </p:txBody>
@@ -2694,7 +2694,7 @@
             <a:pPr algn="ctr"/>
             <a:r>
               <a:rPr lang="en-GB" sz="2000" dirty="0"/>
-              <a:t>1.4 × 1.2</a:t>
+              <a:t>1,4 × 1,2</a:t>
             </a:r>
           </a:p>
         </p:txBody>
@@ -2769,7 +2769,7 @@
             <a:pPr algn="ctr"/>
             <a:r>
               <a:rPr lang="en-GB" sz="2000" dirty="0"/>
-              <a:t>0.27 × 2.6</a:t>
+              <a:t>0,27 × 2,6</a:t>
             </a:r>
           </a:p>
         </p:txBody>
@@ -2844,7 +2844,7 @@
             <a:pPr algn="ctr"/>
             <a:r>
               <a:rPr lang="en-GB" sz="2000" dirty="0"/>
-              <a:t>9 ÷ 0.1</a:t>
+              <a:t>9 ÷ 0,1</a:t>
             </a:r>
           </a:p>
         </p:txBody>
@@ -2880,7 +2880,7 @@
             <a:pPr algn="ctr"/>
             <a:r>
               <a:rPr lang="en-GB" sz="2000" dirty="0"/>
-              <a:t>12 ÷ 0.8</a:t>
+              <a:t>12 ÷ 0,8</a:t>
             </a:r>
           </a:p>
         </p:txBody>
@@ -2916,7 +2916,7 @@
             <a:pPr algn="ctr"/>
             <a:r>
               <a:rPr lang="en-GB" sz="2000" dirty="0"/>
-              <a:t>54.6 ÷ 1.3</a:t>
+              <a:t>54,6 ÷ 1,3</a:t>
             </a:r>
           </a:p>
         </p:txBody>
@@ -2952,7 +2952,7 @@
             <a:pPr algn="ctr"/>
             <a:r>
               <a:rPr lang="en-GB" sz="2000" dirty="0"/>
-              <a:t>109.2 ÷ 4.2</a:t>
+              <a:t>109,2 ÷ 4,2</a:t>
             </a:r>
           </a:p>
         </p:txBody>
@@ -3112,7 +3112,7 @@
             <a:pPr algn="ctr"/>
             <a:r>
               <a:rPr lang="en-GB" sz="2000" dirty="0"/>
-              <a:t>6 × 0.4</a:t>
+              <a:t>6 × 0,4</a:t>
             </a:r>
           </a:p>
         </p:txBody>
@@ -3352,7 +3352,7 @@
             <a:pPr algn="just"/>
             <a:r>
               <a:rPr lang="en-GB" sz="2000" dirty="0"/>
-              <a:t>=2.4</a:t>
+              <a:t>=2,4</a:t>
             </a:r>
           </a:p>
         </p:txBody>
@@ -3388,7 +3388,7 @@
             <a:pPr algn="ctr"/>
             <a:r>
               <a:rPr lang="en-GB" sz="2000" dirty="0"/>
-              <a:t>3.1 × 0.3</a:t>
+              <a:t>3,1 × 0,3</a:t>
             </a:r>
           </a:p>
         </p:txBody>
@@ -3472,7 +3472,7 @@
             <a:pPr algn="just"/>
             <a:r>
               <a:rPr lang="en-GB" sz="2000" dirty="0"/>
-              <a:t>=0.93</a:t>
+              <a:t>=0,93</a:t>
             </a:r>
           </a:p>
         </p:txBody>
@@ -3508,7 +3508,7 @@
             <a:pPr algn="ctr"/>
             <a:r>
               <a:rPr lang="en-GB" sz="2000" dirty="0"/>
-              <a:t>1.4 × 1.2</a:t>
+              <a:t>1,4 × 1,2</a:t>
             </a:r>
           </a:p>
         </p:txBody>
@@ -3592,7 +3592,7 @@
             <a:pPr algn="just"/>
             <a:r>
               <a:rPr lang="en-GB" sz="2000" dirty="0"/>
-              <a:t>=1.68</a:t>
+              <a:t>=1,68</a:t>
             </a:r>
           </a:p>
         </p:txBody>
@@ -3628,7 +3628,7 @@
             <a:pPr algn="ctr"/>
             <a:r>
               <a:rPr lang="en-GB" sz="2000" dirty="0"/>
-              <a:t>0.27 × 2.6</a:t>
+              <a:t>0,27 × 2,6</a:t>
             </a:r>
           </a:p>
         </p:txBody>
@@ -3712,7 +3712,7 @@
             <a:pPr algn="just"/>
             <a:r>
               <a:rPr lang="en-GB" sz="2000" dirty="0"/>
-              <a:t>=0.702</a:t>
+              <a:t>=0,702</a:t>
             </a:r>
           </a:p>
         </p:txBody>
@@ -3748,7 +3748,7 @@
             <a:pPr algn="ctr"/>
             <a:r>
               <a:rPr lang="en-GB" sz="2000" dirty="0"/>
-              <a:t>9 ÷ 0.1</a:t>
+              <a:t>9 ÷ 0,1</a:t>
             </a:r>
           </a:p>
         </p:txBody>
@@ -3829,7 +3829,7 @@
             <a:pPr algn="ctr"/>
             <a:r>
               <a:rPr lang="en-GB" sz="2000" dirty="0"/>
-              <a:t>12 ÷ 0.8</a:t>
+              <a:t>12 ÷ 0,8</a:t>
             </a:r>
           </a:p>
         </p:txBody>
@@ -3910,7 +3910,7 @@
             <a:pPr algn="ctr"/>
             <a:r>
               <a:rPr lang="en-GB" sz="2000" dirty="0"/>
-              <a:t>54.6 ÷ 1.3</a:t>
+              <a:t>54,6 ÷ 1,3</a:t>
             </a:r>
           </a:p>
         </p:txBody>
@@ -3991,7 +3991,7 @@
             <a:pPr algn="ctr"/>
             <a:r>
               <a:rPr lang="en-GB" sz="2000" dirty="0"/>
-              <a:t>109.2 ÷ 4.2</a:t>
+              <a:t>109,2 ÷ 4,2</a:t>
             </a:r>
           </a:p>
         </p:txBody>
